--- a/docs/presentation/claim-triage-deck.pptx
+++ b/docs/presentation/claim-triage-deck.pptx
@@ -121,49 +121,49 @@
   <p:extLst>
     <p:ext uri="{521415D9-36F7-43E2-AB2F-B90AF26B5E84}">
       <p14:sectionLst xmlns:p14="http://schemas.microsoft.com/office/powerpoint/2010/main">
-        <p14:section name="Opening" id="{c50b76a2-3433-339d-bc99-1dd797f4adae}">
+        <p14:section name="Opening" id="{e99f5025-7c60-0c88-c941-9bffef9aca5e}">
           <p14:sldIdLst>
             <p14:sldId id="256"/>
           </p14:sldIdLst>
         </p14:section>
-        <p14:section name="The problem" id="{ea56265f-0cfb-64e3-423b-494fa9e7f1a4}">
+        <p14:section name="The problem" id="{2596b3ce-6452-6bb3-642e-5c33b1061c0b}">
           <p14:sldIdLst>
             <p14:sldId id="257"/>
           </p14:sldIdLst>
         </p14:section>
-        <p14:section name="The hard case" id="{85a37dab-b8cb-97a4-2c7e-a093c6c25af0}">
+        <p14:section name="The hard case" id="{04ad30c5-7581-07f7-0db1-ae86d9422410}">
           <p14:sldIdLst>
             <p14:sldId id="258"/>
             <p14:sldId id="259"/>
           </p14:sldIdLst>
         </p14:section>
-        <p14:section name="Design" id="{a9fff5ff-f924-5dc0-79d8-344da14a2e6e}">
+        <p14:section name="Design" id="{c777e2cc-5f68-f6df-d251-74c224c734e2}">
           <p14:sldIdLst>
             <p14:sldId id="260"/>
             <p14:sldId id="261"/>
             <p14:sldId id="262"/>
           </p14:sldIdLst>
         </p14:section>
-        <p14:section name="Platform" id="{b60fd7ca-f4b7-eb2b-48c2-6fa065abfe87}">
+        <p14:section name="Platform" id="{b989f86a-243a-3970-8616-94c4fd004059}">
           <p14:sldIdLst>
             <p14:sldId id="263"/>
             <p14:sldId id="264"/>
           </p14:sldIdLst>
         </p14:section>
-        <p14:section name="Results" id="{27d68f55-8f7b-57a2-8b86-69e26d65b543}">
+        <p14:section name="Results" id="{a433837b-d383-4e22-9c78-a63adb0704f5}">
           <p14:sldIdLst>
             <p14:sldId id="265"/>
             <p14:sldId id="266"/>
             <p14:sldId id="267"/>
           </p14:sldIdLst>
         </p14:section>
-        <p14:section name="Judgement" id="{fd06b7ed-e947-daac-f4cd-2530e1677558}">
+        <p14:section name="Judgement" id="{2f1f4477-1e30-5cd1-018b-aa50fed70f01}">
           <p14:sldIdLst>
             <p14:sldId id="268"/>
             <p14:sldId id="269"/>
           </p14:sldIdLst>
         </p14:section>
-        <p14:section name="Close" id="{0ab88996-8491-31bd-43e1-7dab8a5e1270}">
+        <p14:section name="Close" id="{f4ce3ca8-c8ae-2a59-f457-f3473ea2bd9f}">
           <p14:sldIdLst>
             <p14:sldId id="270"/>
           </p14:sldIdLst>
@@ -5716,7 +5716,7 @@
                   <a:schemeClr val="bg1"/>
                 </a:solidFill>
               </a:rPr>
-              <a:t>Six incidents — five of them reported success</a:t>
+              <a:t>Seven incidents — six of them reported success</a:t>
             </a:r>
             <a:endParaRPr lang="en-US" sz="3200" dirty="0"/>
           </a:p>
@@ -5730,12 +5730,12 @@
         </p:nvSpPr>
         <p:spPr>
           <a:xfrm>
-            <a:off x="566928" y="1170432"/>
-            <a:ext cx="11027664" cy="786384"/>
+            <a:off x="566928" y="1152144"/>
+            <a:ext cx="11027664" cy="585216"/>
           </a:xfrm>
           <a:prstGeom prst="roundRect">
             <a:avLst>
-              <a:gd name="adj" fmla="val 9302"/>
+              <a:gd name="adj" fmla="val 12500"/>
             </a:avLst>
           </a:prstGeom>
           <a:solidFill>
@@ -5752,31 +5752,31 @@
         </p:nvSpPr>
         <p:spPr>
           <a:xfrm>
-            <a:off x="804672" y="1261872"/>
-            <a:ext cx="548640" cy="603504"/>
-          </a:xfrm>
-          <a:prstGeom prst="rect">
-            <a:avLst/>
-          </a:prstGeom>
-          <a:noFill/>
-          <a:ln/>
-        </p:spPr>
-        <p:txBody>
-          <a:bodyPr wrap="square" lIns="0" tIns="0" rIns="0" bIns="0" rtlCol="0" anchor="ctr"/>
-          <a:lstStyle/>
-          <a:p>
-            <a:pPr indent="0" marL="0">
-              <a:buNone/>
-            </a:pPr>
-            <a:r>
-              <a:rPr lang="en-US" sz="1800" b="1" dirty="0">
+            <a:off x="804672" y="1207008"/>
+            <a:ext cx="548640" cy="475488"/>
+          </a:xfrm>
+          <a:prstGeom prst="rect">
+            <a:avLst/>
+          </a:prstGeom>
+          <a:noFill/>
+          <a:ln/>
+        </p:spPr>
+        <p:txBody>
+          <a:bodyPr wrap="square" lIns="0" tIns="0" rIns="0" bIns="0" rtlCol="0" anchor="ctr"/>
+          <a:lstStyle/>
+          <a:p>
+            <a:pPr indent="0" marL="0">
+              <a:buNone/>
+            </a:pPr>
+            <a:r>
+              <a:rPr lang="en-US" sz="1600" b="1" dirty="0">
                 <a:solidFill>
                   <a:srgbClr val="E0A458"/>
                 </a:solidFill>
               </a:rPr>
               <a:t>01</a:t>
             </a:r>
-            <a:endParaRPr lang="en-US" sz="1800" dirty="0"/>
+            <a:endParaRPr lang="en-US" sz="1600" dirty="0"/>
           </a:p>
         </p:txBody>
       </p:sp>
@@ -5788,8 +5788,8 @@
         </p:nvSpPr>
         <p:spPr>
           <a:xfrm>
-            <a:off x="1408176" y="1271016"/>
-            <a:ext cx="4114800" cy="585216"/>
+            <a:off x="1408176" y="1216152"/>
+            <a:ext cx="4114800" cy="457200"/>
           </a:xfrm>
           <a:prstGeom prst="rect">
             <a:avLst/>
@@ -5808,14 +5808,14 @@
               <a:buNone/>
             </a:pPr>
             <a:r>
-              <a:rPr lang="en-US" sz="1250" b="1" dirty="0">
+              <a:rPr lang="en-US" sz="1200" b="1" dirty="0">
                 <a:solidFill>
                   <a:srgbClr val="FFFFFF"/>
                 </a:solidFill>
               </a:rPr>
               <a:t>Every clause filed under the wrong chapter</a:t>
             </a:r>
-            <a:endParaRPr lang="en-US" sz="1250" dirty="0"/>
+            <a:endParaRPr lang="en-US" sz="1200" dirty="0"/>
           </a:p>
         </p:txBody>
       </p:sp>
@@ -5827,8 +5827,8 @@
         </p:nvSpPr>
         <p:spPr>
           <a:xfrm>
-            <a:off x="5650992" y="1271016"/>
-            <a:ext cx="5760720" cy="585216"/>
+            <a:off x="5650992" y="1197864"/>
+            <a:ext cx="5760720" cy="512064"/>
           </a:xfrm>
           <a:prstGeom prst="rect">
             <a:avLst/>
@@ -5847,14 +5847,14 @@
               <a:buNone/>
             </a:pPr>
             <a:r>
-              <a:rPr lang="en-US" sz="1100" dirty="0">
+              <a:rPr lang="en-US" sz="1000" dirty="0">
                 <a:solidFill>
                   <a:srgbClr val="B9C0CE"/>
                 </a:solidFill>
               </a:rPr>
-              <a:t>A trailing space in the PDF defeated the line-joining test, so a chapter heading was swallowed into the paragraph above. Citations would have quoted the right words and pointed at the wrong page. Nothing failed.</a:t>
-            </a:r>
-            <a:endParaRPr lang="en-US" sz="1100" dirty="0"/>
+              <a:t>A trailing space in the PDF defeated the line-joining test, so a chapter heading was swallowed into the paragraph above. Citations would have pointed at the wrong page. Nothing failed.</a:t>
+            </a:r>
+            <a:endParaRPr lang="en-US" sz="1000" dirty="0"/>
           </a:p>
         </p:txBody>
       </p:sp>
@@ -5866,12 +5866,12 @@
         </p:nvSpPr>
         <p:spPr>
           <a:xfrm>
-            <a:off x="566928" y="2057400"/>
-            <a:ext cx="11027664" cy="786384"/>
+            <a:off x="566928" y="1801368"/>
+            <a:ext cx="11027664" cy="585216"/>
           </a:xfrm>
           <a:prstGeom prst="roundRect">
             <a:avLst>
-              <a:gd name="adj" fmla="val 9302"/>
+              <a:gd name="adj" fmla="val 12500"/>
             </a:avLst>
           </a:prstGeom>
           <a:solidFill>
@@ -5888,31 +5888,31 @@
         </p:nvSpPr>
         <p:spPr>
           <a:xfrm>
-            <a:off x="804672" y="2148840"/>
-            <a:ext cx="548640" cy="603504"/>
-          </a:xfrm>
-          <a:prstGeom prst="rect">
-            <a:avLst/>
-          </a:prstGeom>
-          <a:noFill/>
-          <a:ln/>
-        </p:spPr>
-        <p:txBody>
-          <a:bodyPr wrap="square" lIns="0" tIns="0" rIns="0" bIns="0" rtlCol="0" anchor="ctr"/>
-          <a:lstStyle/>
-          <a:p>
-            <a:pPr indent="0" marL="0">
-              <a:buNone/>
-            </a:pPr>
-            <a:r>
-              <a:rPr lang="en-US" sz="1800" b="1" dirty="0">
+            <a:off x="804672" y="1856232"/>
+            <a:ext cx="548640" cy="475488"/>
+          </a:xfrm>
+          <a:prstGeom prst="rect">
+            <a:avLst/>
+          </a:prstGeom>
+          <a:noFill/>
+          <a:ln/>
+        </p:spPr>
+        <p:txBody>
+          <a:bodyPr wrap="square" lIns="0" tIns="0" rIns="0" bIns="0" rtlCol="0" anchor="ctr"/>
+          <a:lstStyle/>
+          <a:p>
+            <a:pPr indent="0" marL="0">
+              <a:buNone/>
+            </a:pPr>
+            <a:r>
+              <a:rPr lang="en-US" sz="1600" b="1" dirty="0">
                 <a:solidFill>
                   <a:srgbClr val="E0A458"/>
                 </a:solidFill>
               </a:rPr>
               <a:t>02</a:t>
             </a:r>
-            <a:endParaRPr lang="en-US" sz="1800" dirty="0"/>
+            <a:endParaRPr lang="en-US" sz="1600" dirty="0"/>
           </a:p>
         </p:txBody>
       </p:sp>
@@ -5924,8 +5924,8 @@
         </p:nvSpPr>
         <p:spPr>
           <a:xfrm>
-            <a:off x="1408176" y="2157984"/>
-            <a:ext cx="4114800" cy="585216"/>
+            <a:off x="1408176" y="1865376"/>
+            <a:ext cx="4114800" cy="457200"/>
           </a:xfrm>
           <a:prstGeom prst="rect">
             <a:avLst/>
@@ -5944,14 +5944,14 @@
               <a:buNone/>
             </a:pPr>
             <a:r>
-              <a:rPr lang="en-US" sz="1250" b="1" dirty="0">
+              <a:rPr lang="en-US" sz="1200" b="1" dirty="0">
                 <a:solidFill>
                   <a:srgbClr val="FFFFFF"/>
                 </a:solidFill>
               </a:rPr>
               <a:t>The guardrail rewrote the text it protected</a:t>
             </a:r>
-            <a:endParaRPr lang="en-US" sz="1250" dirty="0"/>
+            <a:endParaRPr lang="en-US" sz="1200" dirty="0"/>
           </a:p>
         </p:txBody>
       </p:sp>
@@ -5963,8 +5963,8 @@
         </p:nvSpPr>
         <p:spPr>
           <a:xfrm>
-            <a:off x="5650992" y="2157984"/>
-            <a:ext cx="5760720" cy="585216"/>
+            <a:off x="5650992" y="1847088"/>
+            <a:ext cx="5760720" cy="512064"/>
           </a:xfrm>
           <a:prstGeom prst="rect">
             <a:avLst/>
@@ -5983,14 +5983,14 @@
               <a:buNone/>
             </a:pPr>
             <a:r>
-              <a:rPr lang="en-US" sz="1100" dirty="0">
+              <a:rPr lang="en-US" sz="1000" dirty="0">
                 <a:solidFill>
                   <a:srgbClr val="B9C0CE"/>
                 </a:solidFill>
               </a:rPr>
-              <a:t>It neutralised directives inside retrieved corpus text — which the model then quoted. Quotes no longer matched the stored clause, so runs looped and escalated, looking like a retrieval fault.</a:t>
-            </a:r>
-            <a:endParaRPr lang="en-US" sz="1100" dirty="0"/>
+              <a:t>It neutralised directives inside corpus text the model then quoted. Quotes no longer matched the stored clause, so runs looped and escalated, looking like a retrieval fault.</a:t>
+            </a:r>
+            <a:endParaRPr lang="en-US" sz="1000" dirty="0"/>
           </a:p>
         </p:txBody>
       </p:sp>
@@ -6002,12 +6002,12 @@
         </p:nvSpPr>
         <p:spPr>
           <a:xfrm>
-            <a:off x="566928" y="2944368"/>
-            <a:ext cx="11027664" cy="786384"/>
+            <a:off x="566928" y="2450592"/>
+            <a:ext cx="11027664" cy="585216"/>
           </a:xfrm>
           <a:prstGeom prst="roundRect">
             <a:avLst>
-              <a:gd name="adj" fmla="val 9302"/>
+              <a:gd name="adj" fmla="val 12500"/>
             </a:avLst>
           </a:prstGeom>
           <a:solidFill>
@@ -6024,31 +6024,31 @@
         </p:nvSpPr>
         <p:spPr>
           <a:xfrm>
-            <a:off x="804672" y="3035808"/>
-            <a:ext cx="548640" cy="603504"/>
-          </a:xfrm>
-          <a:prstGeom prst="rect">
-            <a:avLst/>
-          </a:prstGeom>
-          <a:noFill/>
-          <a:ln/>
-        </p:spPr>
-        <p:txBody>
-          <a:bodyPr wrap="square" lIns="0" tIns="0" rIns="0" bIns="0" rtlCol="0" anchor="ctr"/>
-          <a:lstStyle/>
-          <a:p>
-            <a:pPr indent="0" marL="0">
-              <a:buNone/>
-            </a:pPr>
-            <a:r>
-              <a:rPr lang="en-US" sz="1800" b="1" dirty="0">
+            <a:off x="804672" y="2505456"/>
+            <a:ext cx="548640" cy="475488"/>
+          </a:xfrm>
+          <a:prstGeom prst="rect">
+            <a:avLst/>
+          </a:prstGeom>
+          <a:noFill/>
+          <a:ln/>
+        </p:spPr>
+        <p:txBody>
+          <a:bodyPr wrap="square" lIns="0" tIns="0" rIns="0" bIns="0" rtlCol="0" anchor="ctr"/>
+          <a:lstStyle/>
+          <a:p>
+            <a:pPr indent="0" marL="0">
+              <a:buNone/>
+            </a:pPr>
+            <a:r>
+              <a:rPr lang="en-US" sz="1600" b="1" dirty="0">
                 <a:solidFill>
                   <a:srgbClr val="E0A458"/>
                 </a:solidFill>
               </a:rPr>
               <a:t>03</a:t>
             </a:r>
-            <a:endParaRPr lang="en-US" sz="1800" dirty="0"/>
+            <a:endParaRPr lang="en-US" sz="1600" dirty="0"/>
           </a:p>
         </p:txBody>
       </p:sp>
@@ -6060,8 +6060,8 @@
         </p:nvSpPr>
         <p:spPr>
           <a:xfrm>
-            <a:off x="1408176" y="3044952"/>
-            <a:ext cx="4114800" cy="585216"/>
+            <a:off x="1408176" y="2514600"/>
+            <a:ext cx="4114800" cy="457200"/>
           </a:xfrm>
           <a:prstGeom prst="rect">
             <a:avLst/>
@@ -6080,14 +6080,14 @@
               <a:buNone/>
             </a:pPr>
             <a:r>
-              <a:rPr lang="en-US" sz="1250" b="1" dirty="0">
+              <a:rPr lang="en-US" sz="1200" b="1" dirty="0">
                 <a:solidFill>
                   <a:srgbClr val="FFFFFF"/>
                 </a:solidFill>
               </a:rPr>
               <a:t>The load test declared the objective met on 100% failures</a:t>
             </a:r>
-            <a:endParaRPr lang="en-US" sz="1250" dirty="0"/>
+            <a:endParaRPr lang="en-US" sz="1200" dirty="0"/>
           </a:p>
         </p:txBody>
       </p:sp>
@@ -6099,8 +6099,8 @@
         </p:nvSpPr>
         <p:spPr>
           <a:xfrm>
-            <a:off x="5650992" y="3044952"/>
-            <a:ext cx="5760720" cy="585216"/>
+            <a:off x="5650992" y="2496312"/>
+            <a:ext cx="5760720" cy="512064"/>
           </a:xfrm>
           <a:prstGeom prst="rect">
             <a:avLst/>
@@ -6119,14 +6119,14 @@
               <a:buNone/>
             </a:pPr>
             <a:r>
-              <a:rPr lang="en-US" sz="1100" dirty="0">
+              <a:rPr lang="en-US" sz="1000" dirty="0">
                 <a:solidFill>
                   <a:srgbClr val="B9C0CE"/>
                 </a:solidFill>
               </a:rPr>
               <a:t>Hard-coded policy dates against a now()-derived loss date. Every claim was rejected in 3 ms, so the run looked fast: p95 0.00 s, target met.</a:t>
             </a:r>
-            <a:endParaRPr lang="en-US" sz="1100" dirty="0"/>
+            <a:endParaRPr lang="en-US" sz="1000" dirty="0"/>
           </a:p>
         </p:txBody>
       </p:sp>
@@ -6138,12 +6138,12 @@
         </p:nvSpPr>
         <p:spPr>
           <a:xfrm>
-            <a:off x="566928" y="3831336"/>
-            <a:ext cx="11027664" cy="786384"/>
+            <a:off x="566928" y="3099816"/>
+            <a:ext cx="11027664" cy="585216"/>
           </a:xfrm>
           <a:prstGeom prst="roundRect">
             <a:avLst>
-              <a:gd name="adj" fmla="val 9302"/>
+              <a:gd name="adj" fmla="val 12500"/>
             </a:avLst>
           </a:prstGeom>
           <a:solidFill>
@@ -6160,31 +6160,31 @@
         </p:nvSpPr>
         <p:spPr>
           <a:xfrm>
-            <a:off x="804672" y="3922776"/>
-            <a:ext cx="548640" cy="603504"/>
-          </a:xfrm>
-          <a:prstGeom prst="rect">
-            <a:avLst/>
-          </a:prstGeom>
-          <a:noFill/>
-          <a:ln/>
-        </p:spPr>
-        <p:txBody>
-          <a:bodyPr wrap="square" lIns="0" tIns="0" rIns="0" bIns="0" rtlCol="0" anchor="ctr"/>
-          <a:lstStyle/>
-          <a:p>
-            <a:pPr indent="0" marL="0">
-              <a:buNone/>
-            </a:pPr>
-            <a:r>
-              <a:rPr lang="en-US" sz="1800" b="1" dirty="0">
+            <a:off x="804672" y="3154680"/>
+            <a:ext cx="548640" cy="475488"/>
+          </a:xfrm>
+          <a:prstGeom prst="rect">
+            <a:avLst/>
+          </a:prstGeom>
+          <a:noFill/>
+          <a:ln/>
+        </p:spPr>
+        <p:txBody>
+          <a:bodyPr wrap="square" lIns="0" tIns="0" rIns="0" bIns="0" rtlCol="0" anchor="ctr"/>
+          <a:lstStyle/>
+          <a:p>
+            <a:pPr indent="0" marL="0">
+              <a:buNone/>
+            </a:pPr>
+            <a:r>
+              <a:rPr lang="en-US" sz="1600" b="1" dirty="0">
                 <a:solidFill>
                   <a:srgbClr val="E0A458"/>
                 </a:solidFill>
               </a:rPr>
               <a:t>04</a:t>
             </a:r>
-            <a:endParaRPr lang="en-US" sz="1800" dirty="0"/>
+            <a:endParaRPr lang="en-US" sz="1600" dirty="0"/>
           </a:p>
         </p:txBody>
       </p:sp>
@@ -6196,8 +6196,8 @@
         </p:nvSpPr>
         <p:spPr>
           <a:xfrm>
-            <a:off x="1408176" y="3931920"/>
-            <a:ext cx="4114800" cy="585216"/>
+            <a:off x="1408176" y="3163824"/>
+            <a:ext cx="4114800" cy="457200"/>
           </a:xfrm>
           <a:prstGeom prst="rect">
             <a:avLst/>
@@ -6216,14 +6216,14 @@
               <a:buNone/>
             </a:pPr>
             <a:r>
-              <a:rPr lang="en-US" sz="1250" b="1" dirty="0">
+              <a:rPr lang="en-US" sz="1200" b="1" dirty="0">
                 <a:solidFill>
                   <a:srgbClr val="FFFFFF"/>
                 </a:solidFill>
               </a:rPr>
               <a:t>The cache made its own benefit invisible</a:t>
             </a:r>
-            <a:endParaRPr lang="en-US" sz="1250" dirty="0"/>
+            <a:endParaRPr lang="en-US" sz="1200" dirty="0"/>
           </a:p>
         </p:txBody>
       </p:sp>
@@ -6235,8 +6235,8 @@
         </p:nvSpPr>
         <p:spPr>
           <a:xfrm>
-            <a:off x="5650992" y="3931920"/>
-            <a:ext cx="5760720" cy="585216"/>
+            <a:off x="5650992" y="3145536"/>
+            <a:ext cx="5760720" cy="512064"/>
           </a:xfrm>
           <a:prstGeom prst="rect">
             <a:avLst/>
@@ -6255,14 +6255,14 @@
               <a:buNone/>
             </a:pPr>
             <a:r>
-              <a:rPr lang="en-US" sz="1100" dirty="0">
+              <a:rPr lang="en-US" sz="1000" dirty="0">
                 <a:solidFill>
                   <a:srgbClr val="B9C0CE"/>
                 </a:solidFill>
               </a:rPr>
               <a:t>A cache hit replayed the originating run's token count, inflating cost-per-100-runs by exactly the amount the cache saved.</a:t>
             </a:r>
-            <a:endParaRPr lang="en-US" sz="1100" dirty="0"/>
+            <a:endParaRPr lang="en-US" sz="1000" dirty="0"/>
           </a:p>
         </p:txBody>
       </p:sp>
@@ -6274,12 +6274,12 @@
         </p:nvSpPr>
         <p:spPr>
           <a:xfrm>
-            <a:off x="566928" y="4718304"/>
-            <a:ext cx="11027664" cy="786384"/>
+            <a:off x="566928" y="3749040"/>
+            <a:ext cx="11027664" cy="585216"/>
           </a:xfrm>
           <a:prstGeom prst="roundRect">
             <a:avLst>
-              <a:gd name="adj" fmla="val 9302"/>
+              <a:gd name="adj" fmla="val 12500"/>
             </a:avLst>
           </a:prstGeom>
           <a:solidFill>
@@ -6296,31 +6296,31 @@
         </p:nvSpPr>
         <p:spPr>
           <a:xfrm>
-            <a:off x="804672" y="4809744"/>
-            <a:ext cx="548640" cy="603504"/>
-          </a:xfrm>
-          <a:prstGeom prst="rect">
-            <a:avLst/>
-          </a:prstGeom>
-          <a:noFill/>
-          <a:ln/>
-        </p:spPr>
-        <p:txBody>
-          <a:bodyPr wrap="square" lIns="0" tIns="0" rIns="0" bIns="0" rtlCol="0" anchor="ctr"/>
-          <a:lstStyle/>
-          <a:p>
-            <a:pPr indent="0" marL="0">
-              <a:buNone/>
-            </a:pPr>
-            <a:r>
-              <a:rPr lang="en-US" sz="1800" b="1" dirty="0">
+            <a:off x="804672" y="3803904"/>
+            <a:ext cx="548640" cy="475488"/>
+          </a:xfrm>
+          <a:prstGeom prst="rect">
+            <a:avLst/>
+          </a:prstGeom>
+          <a:noFill/>
+          <a:ln/>
+        </p:spPr>
+        <p:txBody>
+          <a:bodyPr wrap="square" lIns="0" tIns="0" rIns="0" bIns="0" rtlCol="0" anchor="ctr"/>
+          <a:lstStyle/>
+          <a:p>
+            <a:pPr indent="0" marL="0">
+              <a:buNone/>
+            </a:pPr>
+            <a:r>
+              <a:rPr lang="en-US" sz="1600" b="1" dirty="0">
                 <a:solidFill>
                   <a:srgbClr val="E0A458"/>
                 </a:solidFill>
               </a:rPr>
               <a:t>05</a:t>
             </a:r>
-            <a:endParaRPr lang="en-US" sz="1800" dirty="0"/>
+            <a:endParaRPr lang="en-US" sz="1600" dirty="0"/>
           </a:p>
         </p:txBody>
       </p:sp>
@@ -6332,8 +6332,8 @@
         </p:nvSpPr>
         <p:spPr>
           <a:xfrm>
-            <a:off x="1408176" y="4818888"/>
-            <a:ext cx="4114800" cy="585216"/>
+            <a:off x="1408176" y="3813048"/>
+            <a:ext cx="4114800" cy="457200"/>
           </a:xfrm>
           <a:prstGeom prst="rect">
             <a:avLst/>
@@ -6352,14 +6352,14 @@
               <a:buNone/>
             </a:pPr>
             <a:r>
-              <a:rPr lang="en-US" sz="1250" b="1" dirty="0">
+              <a:rPr lang="en-US" sz="1200" b="1" dirty="0">
                 <a:solidFill>
                   <a:srgbClr val="FFFFFF"/>
                 </a:solidFill>
               </a:rPr>
               <a:t>The largest cost driver was reported as the cheapest step</a:t>
             </a:r>
-            <a:endParaRPr lang="en-US" sz="1250" dirty="0"/>
+            <a:endParaRPr lang="en-US" sz="1200" dirty="0"/>
           </a:p>
         </p:txBody>
       </p:sp>
@@ -6371,8 +6371,8 @@
         </p:nvSpPr>
         <p:spPr>
           <a:xfrm>
-            <a:off x="5650992" y="4818888"/>
-            <a:ext cx="5760720" cy="585216"/>
+            <a:off x="5650992" y="3794760"/>
+            <a:ext cx="5760720" cy="512064"/>
           </a:xfrm>
           <a:prstGeom prst="rect">
             <a:avLst/>
@@ -6391,31 +6391,167 @@
               <a:buNone/>
             </a:pPr>
             <a:r>
-              <a:rPr lang="en-US" sz="1100" dirty="0">
+              <a:rPr lang="en-US" sz="1000" dirty="0">
                 <a:solidFill>
                   <a:srgbClr val="B9C0CE"/>
                 </a:solidFill>
               </a:rPr>
               <a:t>max() over per-step spend, where every price is zero on a free tier, returns whichever key comes first.</a:t>
             </a:r>
-            <a:endParaRPr lang="en-US" sz="1100" dirty="0"/>
-          </a:p>
-        </p:txBody>
-      </p:sp>
-      <p:sp>
-        <p:nvSpPr>
-          <p:cNvPr id="23" name="thread"/>
+            <a:endParaRPr lang="en-US" sz="1000" dirty="0"/>
+          </a:p>
+        </p:txBody>
+      </p:sp>
+      <p:sp>
+        <p:nvSpPr>
+          <p:cNvPr id="23" name="inc-5"/>
           <p:cNvSpPr/>
           <p:nvPr/>
         </p:nvSpPr>
         <p:spPr>
           <a:xfrm>
-            <a:off x="566928" y="5577840"/>
-            <a:ext cx="11027664" cy="713232"/>
+            <a:off x="566928" y="4398264"/>
+            <a:ext cx="11027664" cy="585216"/>
           </a:xfrm>
           <a:prstGeom prst="roundRect">
             <a:avLst>
-              <a:gd name="adj" fmla="val 10256"/>
+              <a:gd name="adj" fmla="val 12500"/>
+            </a:avLst>
+          </a:prstGeom>
+          <a:solidFill>
+            <a:srgbClr val="2E3346"/>
+          </a:solidFill>
+          <a:ln/>
+        </p:spPr>
+      </p:sp>
+      <p:sp>
+        <p:nvSpPr>
+          <p:cNvPr id="24" name="inc-5-n"/>
+          <p:cNvSpPr txBox="1"/>
+          <p:nvPr/>
+        </p:nvSpPr>
+        <p:spPr>
+          <a:xfrm>
+            <a:off x="804672" y="4453128"/>
+            <a:ext cx="548640" cy="475488"/>
+          </a:xfrm>
+          <a:prstGeom prst="rect">
+            <a:avLst/>
+          </a:prstGeom>
+          <a:noFill/>
+          <a:ln/>
+        </p:spPr>
+        <p:txBody>
+          <a:bodyPr wrap="square" lIns="0" tIns="0" rIns="0" bIns="0" rtlCol="0" anchor="ctr"/>
+          <a:lstStyle/>
+          <a:p>
+            <a:pPr indent="0" marL="0">
+              <a:buNone/>
+            </a:pPr>
+            <a:r>
+              <a:rPr lang="en-US" sz="1600" b="1" dirty="0">
+                <a:solidFill>
+                  <a:srgbClr val="E0A458"/>
+                </a:solidFill>
+              </a:rPr>
+              <a:t>06</a:t>
+            </a:r>
+            <a:endParaRPr lang="en-US" sz="1600" dirty="0"/>
+          </a:p>
+        </p:txBody>
+      </p:sp>
+      <p:sp>
+        <p:nvSpPr>
+          <p:cNvPr id="25" name="inc-5-head"/>
+          <p:cNvSpPr txBox="1"/>
+          <p:nvPr/>
+        </p:nvSpPr>
+        <p:spPr>
+          <a:xfrm>
+            <a:off x="1408176" y="4462272"/>
+            <a:ext cx="4114800" cy="457200"/>
+          </a:xfrm>
+          <a:prstGeom prst="rect">
+            <a:avLst/>
+          </a:prstGeom>
+          <a:noFill/>
+          <a:ln/>
+        </p:spPr>
+        <p:txBody>
+          <a:bodyPr wrap="square" lIns="0" tIns="0" rIns="0" bIns="0" rtlCol="0" anchor="ctr"/>
+          <a:lstStyle/>
+          <a:p>
+            <a:pPr indent="0" marL="0">
+              <a:lnSpc>
+                <a:spcPct val="104000"/>
+              </a:lnSpc>
+              <a:buNone/>
+            </a:pPr>
+            <a:r>
+              <a:rPr lang="en-US" sz="1200" b="1" dirty="0">
+                <a:solidFill>
+                  <a:srgbClr val="FFFFFF"/>
+                </a:solidFill>
+              </a:rPr>
+              <a:t>The same date bug again, in a second file</a:t>
+            </a:r>
+            <a:endParaRPr lang="en-US" sz="1200" dirty="0"/>
+          </a:p>
+        </p:txBody>
+      </p:sp>
+      <p:sp>
+        <p:nvSpPr>
+          <p:cNvPr id="26" name="inc-5-body"/>
+          <p:cNvSpPr txBox="1"/>
+          <p:nvPr/>
+        </p:nvSpPr>
+        <p:spPr>
+          <a:xfrm>
+            <a:off x="5650992" y="4443984"/>
+            <a:ext cx="5760720" cy="512064"/>
+          </a:xfrm>
+          <a:prstGeom prst="rect">
+            <a:avLst/>
+          </a:prstGeom>
+          <a:noFill/>
+          <a:ln/>
+        </p:spPr>
+        <p:txBody>
+          <a:bodyPr wrap="square" lIns="0" tIns="0" rIns="0" bIns="0" rtlCol="0" anchor="ctr"/>
+          <a:lstStyle/>
+          <a:p>
+            <a:pPr indent="0" marL="0">
+              <a:lnSpc>
+                <a:spcPct val="108000"/>
+              </a:lnSpc>
+              <a:buNone/>
+            </a:pPr>
+            <a:r>
+              <a:rPr lang="en-US" sz="1000" dirty="0">
+                <a:solidFill>
+                  <a:srgbClr val="B9C0CE"/>
+                </a:solidFill>
+              </a:rPr>
+              <a:t>The web client paired a now()-derived loss date with a hard-coded policy period. Unusable for months while every test passed against a different fixture.</a:t>
+            </a:r>
+            <a:endParaRPr lang="en-US" sz="1000" dirty="0"/>
+          </a:p>
+        </p:txBody>
+      </p:sp>
+      <p:sp>
+        <p:nvSpPr>
+          <p:cNvPr id="27" name="thread"/>
+          <p:cNvSpPr/>
+          <p:nvPr/>
+        </p:nvSpPr>
+        <p:spPr>
+          <a:xfrm>
+            <a:off x="566928" y="5705856"/>
+            <a:ext cx="11027664" cy="566928"/>
+          </a:xfrm>
+          <a:prstGeom prst="roundRect">
+            <a:avLst>
+              <a:gd name="adj" fmla="val 12903"/>
             </a:avLst>
           </a:prstGeom>
           <a:solidFill>
@@ -6426,14 +6562,14 @@
       </p:sp>
       <p:sp>
         <p:nvSpPr>
-          <p:cNvPr id="24" name="thread-text"/>
-          <p:cNvSpPr txBox="1"/>
-          <p:nvPr/>
-        </p:nvSpPr>
-        <p:spPr>
-          <a:xfrm>
-            <a:off x="877824" y="5577840"/>
-            <a:ext cx="10405872" cy="713232"/>
+          <p:cNvPr id="28" name="thread-text"/>
+          <p:cNvSpPr txBox="1"/>
+          <p:nvPr/>
+        </p:nvSpPr>
+        <p:spPr>
+          <a:xfrm>
+            <a:off x="877824" y="5705856"/>
+            <a:ext cx="10405872" cy="566928"/>
           </a:xfrm>
           <a:prstGeom prst="rect">
             <a:avLst/>
@@ -6452,7 +6588,7 @@
               <a:buNone/>
             </a:pPr>
             <a:r>
-              <a:rPr lang="en-US" sz="1250" b="1" dirty="0">
+              <a:rPr lang="en-US" sz="1150" b="1" dirty="0">
                 <a:solidFill>
                   <a:srgbClr val="E0A458"/>
                 </a:solidFill>
@@ -6466,20 +6602,20 @@
               <a:buNone/>
             </a:pPr>
             <a:r>
-              <a:rPr lang="en-US" sz="1250" dirty="0">
+              <a:rPr lang="en-US" sz="1150" dirty="0">
                 <a:solidFill>
                   <a:srgbClr val="F3E3DF"/>
                 </a:solidFill>
               </a:rPr>
-              <a:t>every one produced a plausible-looking result rather than an error. That is the failure mode this kind of system has — and the argument for the deterministic citation check, the valid_for_reporting flag, and a load test that refuses to conclude.</a:t>
-            </a:r>
-            <a:endParaRPr lang="en-US" sz="1250" dirty="0"/>
-          </a:p>
-        </p:txBody>
-      </p:sp>
-      <p:sp>
-        <p:nvSpPr>
-          <p:cNvPr id="26" name="Text 0"/>
+              <a:t>each produced a plausible-looking result rather than an error — the argument for the deterministic citation check, the valid_for_reporting flag, and a load test that refuses to conclude.</a:t>
+            </a:r>
+            <a:endParaRPr lang="en-US" sz="1150" dirty="0"/>
+          </a:p>
+        </p:txBody>
+      </p:sp>
+      <p:sp>
+        <p:nvSpPr>
+          <p:cNvPr id="30" name="Text 0"/>
           <p:cNvSpPr/>
           <p:nvPr>
             <p:ph idx="101" type="body" hasCustomPrompt="1"/>

--- a/docs/presentation/claim-triage-deck.pptx
+++ b/docs/presentation/claim-triage-deck.pptx
@@ -121,49 +121,49 @@
   <p:extLst>
     <p:ext uri="{521415D9-36F7-43E2-AB2F-B90AF26B5E84}">
       <p14:sectionLst xmlns:p14="http://schemas.microsoft.com/office/powerpoint/2010/main">
-        <p14:section name="Opening" id="{e99f5025-7c60-0c88-c941-9bffef9aca5e}">
+        <p14:section name="Opening" id="{f9be6132-4f05-ba3c-b487-a635acd172cc}">
           <p14:sldIdLst>
             <p14:sldId id="256"/>
           </p14:sldIdLst>
         </p14:section>
-        <p14:section name="The problem" id="{2596b3ce-6452-6bb3-642e-5c33b1061c0b}">
+        <p14:section name="The problem" id="{9b3ec460-989b-6cc7-e2ef-f65f81236e01}">
           <p14:sldIdLst>
             <p14:sldId id="257"/>
           </p14:sldIdLst>
         </p14:section>
-        <p14:section name="The hard case" id="{04ad30c5-7581-07f7-0db1-ae86d9422410}">
+        <p14:section name="The hard case" id="{2a43368f-44b5-0e96-ae52-ae06055c88b5}">
           <p14:sldIdLst>
             <p14:sldId id="258"/>
             <p14:sldId id="259"/>
           </p14:sldIdLst>
         </p14:section>
-        <p14:section name="Design" id="{c777e2cc-5f68-f6df-d251-74c224c734e2}">
+        <p14:section name="Design" id="{288b5dcd-530f-487c-0beb-4bd63d60a389}">
           <p14:sldIdLst>
             <p14:sldId id="260"/>
             <p14:sldId id="261"/>
             <p14:sldId id="262"/>
           </p14:sldIdLst>
         </p14:section>
-        <p14:section name="Platform" id="{b989f86a-243a-3970-8616-94c4fd004059}">
+        <p14:section name="Platform" id="{f3e548e6-925e-678c-f6f3-4ece0aa9751f}">
           <p14:sldIdLst>
             <p14:sldId id="263"/>
             <p14:sldId id="264"/>
           </p14:sldIdLst>
         </p14:section>
-        <p14:section name="Results" id="{a433837b-d383-4e22-9c78-a63adb0704f5}">
+        <p14:section name="Results" id="{74f2c858-b914-494b-3db1-ac2c1f4d83bd}">
           <p14:sldIdLst>
             <p14:sldId id="265"/>
             <p14:sldId id="266"/>
             <p14:sldId id="267"/>
           </p14:sldIdLst>
         </p14:section>
-        <p14:section name="Judgement" id="{2f1f4477-1e30-5cd1-018b-aa50fed70f01}">
+        <p14:section name="Judgement" id="{5a28c5a6-9703-20d9-171d-8c06cbdf0cbf}">
           <p14:sldIdLst>
             <p14:sldId id="268"/>
             <p14:sldId id="269"/>
           </p14:sldIdLst>
         </p14:section>
-        <p14:section name="Close" id="{f4ce3ca8-c8ae-2a59-f457-f3473ea2bd9f}">
+        <p14:section name="Close" id="{d4eb91a7-f495-4924-8846-b4001048de72}">
           <p14:sldIdLst>
             <p14:sldId id="270"/>
           </p14:sldIdLst>
@@ -5716,7 +5716,7 @@
                   <a:schemeClr val="bg1"/>
                 </a:solidFill>
               </a:rPr>
-              <a:t>Seven incidents — six of them reported success</a:t>
+              <a:t>Eight incidents — six of them reported success</a:t>
             </a:r>
             <a:endParaRPr lang="en-US" sz="3200" dirty="0"/>
           </a:p>
